--- a/note.pptx
+++ b/note.pptx
@@ -5,12 +5,14 @@
     <p:sldMasterId id="2147483648" r:id="rId1"/>
   </p:sldMasterIdLst>
   <p:notesMasterIdLst>
-    <p:notesMasterId r:id="rId5"/>
+    <p:notesMasterId r:id="rId7"/>
   </p:notesMasterIdLst>
   <p:sldIdLst>
     <p:sldId id="282" r:id="rId2"/>
-    <p:sldId id="283" r:id="rId3"/>
-    <p:sldId id="284" r:id="rId4"/>
+    <p:sldId id="286" r:id="rId3"/>
+    <p:sldId id="283" r:id="rId4"/>
+    <p:sldId id="285" r:id="rId5"/>
+    <p:sldId id="284" r:id="rId6"/>
   </p:sldIdLst>
   <p:sldSz cx="12192000" cy="6858000"/>
   <p:notesSz cx="6858000" cy="9144000"/>
@@ -199,7 +201,7 @@
           <a:p>
             <a:fld id="{ACAA766A-9492-44F8-BA90-8FEBF291354D}" type="datetimeFigureOut">
               <a:rPr kumimoji="1" lang="ja-JP" altLang="en-US" smtClean="0"/>
-              <a:t>2026/3/2</a:t>
+              <a:t>2026/3/4</a:t>
             </a:fld>
             <a:endParaRPr kumimoji="1" lang="ja-JP" altLang="en-US"/>
           </a:p>
@@ -677,13 +679,80 @@
             </a:r>
           </a:p>
           <a:p>
+            <a:pPr marL="0" marR="0" lvl="0" indent="0" algn="l" defTabSz="914400" rtl="0" eaLnBrk="1" fontAlgn="auto" latinLnBrk="0" hangingPunct="1">
+              <a:lnSpc>
+                <a:spcPct val="100000"/>
+              </a:lnSpc>
+              <a:spcBef>
+                <a:spcPts val="0"/>
+              </a:spcBef>
+              <a:spcAft>
+                <a:spcPts val="0"/>
+              </a:spcAft>
+              <a:buClrTx/>
+              <a:buSzTx/>
+              <a:buFontTx/>
+              <a:buNone/>
+              <a:tabLst/>
+              <a:defRPr/>
+            </a:pPr>
             <a:r>
               <a:rPr lang="en-US" altLang="ja-JP" dirty="0">
                 <a:hlinkClick r:id="rId3"/>
               </a:rPr>
-              <a:t>Resonant Free Power Network Design</a:t>
-            </a:r>
-            <a:endParaRPr kumimoji="1" lang="ja-JP" altLang="en-US" dirty="0"/>
+              <a:t>https://www.oldfriend.url.tw/SPISim/ansys_ch_Equalizer.html</a:t>
+            </a:r>
+            <a:endParaRPr lang="ja-JP" altLang="en-US" dirty="0"/>
+          </a:p>
+          <a:p>
+            <a:pPr marL="0" marR="0" lvl="0" indent="0" algn="l" defTabSz="914400" rtl="0" eaLnBrk="1" fontAlgn="auto" latinLnBrk="0" hangingPunct="1">
+              <a:lnSpc>
+                <a:spcPct val="100000"/>
+              </a:lnSpc>
+              <a:spcBef>
+                <a:spcPts val="0"/>
+              </a:spcBef>
+              <a:spcAft>
+                <a:spcPts val="0"/>
+              </a:spcAft>
+              <a:buClrTx/>
+              <a:buSzTx/>
+              <a:buFontTx/>
+              <a:buNone/>
+              <a:tabLst/>
+              <a:defRPr/>
+            </a:pPr>
+            <a:r>
+              <a:rPr kumimoji="1" lang="en-US" altLang="ja-JP" sz="1200" b="0" i="0" u="none" strike="noStrike" kern="1200" cap="none" spc="0" normalizeH="0" baseline="0" noProof="0" dirty="0">
+                <a:ln>
+                  <a:noFill/>
+                </a:ln>
+                <a:solidFill>
+                  <a:prstClr val="black"/>
+                </a:solidFill>
+                <a:effectLst/>
+                <a:uLnTx/>
+                <a:uFillTx/>
+                <a:latin typeface="游ゴシック" panose="02110004020202020204"/>
+                <a:ea typeface="游ゴシック" panose="020B0400000000000000" pitchFamily="34" charset="-128"/>
+                <a:cs typeface="+mn-cs"/>
+              </a:rPr>
+              <a:t>https://cc.ee.ntu.edu.tw/~rbwu/rapid_content/course/highspeed/SI10_Equalization.pdf</a:t>
+            </a:r>
+            <a:endParaRPr kumimoji="1" lang="ja-JP" altLang="en-US" sz="1200" b="0" i="0" u="none" strike="noStrike" kern="1200" cap="none" spc="0" normalizeH="0" baseline="0" noProof="0" dirty="0">
+              <a:ln>
+                <a:noFill/>
+              </a:ln>
+              <a:solidFill>
+                <a:prstClr val="black"/>
+              </a:solidFill>
+              <a:effectLst/>
+              <a:uLnTx/>
+              <a:uFillTx/>
+              <a:latin typeface="游ゴシック" panose="02110004020202020204"/>
+              <a:ea typeface="游ゴシック" panose="020B0400000000000000" pitchFamily="34" charset="-128"/>
+              <a:cs typeface="+mn-cs"/>
+            </a:endParaRPr>
           </a:p>
         </p:txBody>
       </p:sp>
@@ -704,7 +773,7 @@
           <a:p>
             <a:fld id="{E37B1139-74DB-482D-9555-AA93BA231EA4}" type="slidenum">
               <a:rPr kumimoji="1" lang="ja-JP" altLang="en-US" smtClean="0"/>
-              <a:t>2</a:t>
+              <a:t>3</a:t>
             </a:fld>
             <a:endParaRPr kumimoji="1" lang="ja-JP" altLang="en-US"/>
           </a:p>
@@ -714,6 +783,90 @@
     <p:extLst>
       <p:ext uri="{BB962C8B-B14F-4D97-AF65-F5344CB8AC3E}">
         <p14:creationId xmlns:p14="http://schemas.microsoft.com/office/powerpoint/2010/main" val="900368473"/>
+      </p:ext>
+    </p:extLst>
+  </p:cSld>
+  <p:clrMapOvr>
+    <a:masterClrMapping/>
+  </p:clrMapOvr>
+</p:notes>
+</file>
+
+<file path=ppt/notesSlides/notesSlide3.xml><?xml version="1.0" encoding="utf-8"?>
+<p:notes xmlns:a="http://schemas.openxmlformats.org/drawingml/2006/main" xmlns:r="http://schemas.openxmlformats.org/officeDocument/2006/relationships" xmlns:p="http://schemas.openxmlformats.org/presentationml/2006/main">
+  <p:cSld>
+    <p:spTree>
+      <p:nvGrpSpPr>
+        <p:cNvPr id="1" name=""/>
+        <p:cNvGrpSpPr/>
+        <p:nvPr/>
+      </p:nvGrpSpPr>
+      <p:grpSpPr>
+        <a:xfrm>
+          <a:off x="0" y="0"/>
+          <a:ext cx="0" cy="0"/>
+          <a:chOff x="0" y="0"/>
+          <a:chExt cx="0" cy="0"/>
+        </a:xfrm>
+      </p:grpSpPr>
+      <p:sp>
+        <p:nvSpPr>
+          <p:cNvPr id="2" name="投影片影像版面配置區 1"/>
+          <p:cNvSpPr>
+            <a:spLocks noGrp="1" noRot="1" noChangeAspect="1"/>
+          </p:cNvSpPr>
+          <p:nvPr>
+            <p:ph type="sldImg"/>
+          </p:nvPr>
+        </p:nvSpPr>
+        <p:spPr/>
+      </p:sp>
+      <p:sp>
+        <p:nvSpPr>
+          <p:cNvPr id="3" name="備忘稿版面配置區 2"/>
+          <p:cNvSpPr>
+            <a:spLocks noGrp="1"/>
+          </p:cNvSpPr>
+          <p:nvPr>
+            <p:ph type="body" idx="1"/>
+          </p:nvPr>
+        </p:nvSpPr>
+        <p:spPr/>
+        <p:txBody>
+          <a:bodyPr/>
+          <a:lstStyle/>
+          <a:p>
+            <a:endParaRPr kumimoji="1" lang="ja-JP" altLang="en-US" dirty="0"/>
+          </a:p>
+        </p:txBody>
+      </p:sp>
+      <p:sp>
+        <p:nvSpPr>
+          <p:cNvPr id="4" name="投影片編號版面配置區 3"/>
+          <p:cNvSpPr>
+            <a:spLocks noGrp="1"/>
+          </p:cNvSpPr>
+          <p:nvPr>
+            <p:ph type="sldNum" sz="quarter" idx="5"/>
+          </p:nvPr>
+        </p:nvSpPr>
+        <p:spPr/>
+        <p:txBody>
+          <a:bodyPr/>
+          <a:lstStyle/>
+          <a:p>
+            <a:fld id="{E37B1139-74DB-482D-9555-AA93BA231EA4}" type="slidenum">
+              <a:rPr kumimoji="1" lang="ja-JP" altLang="en-US" smtClean="0"/>
+              <a:t>5</a:t>
+            </a:fld>
+            <a:endParaRPr kumimoji="1" lang="ja-JP" altLang="en-US"/>
+          </a:p>
+        </p:txBody>
+      </p:sp>
+    </p:spTree>
+    <p:extLst>
+      <p:ext uri="{BB962C8B-B14F-4D97-AF65-F5344CB8AC3E}">
+        <p14:creationId xmlns:p14="http://schemas.microsoft.com/office/powerpoint/2010/main" val="4141272872"/>
       </p:ext>
     </p:extLst>
   </p:cSld>
@@ -870,7 +1023,7 @@
           <a:p>
             <a:fld id="{AD2FC38A-1560-48A0-AF93-703BDD9B32DF}" type="datetimeFigureOut">
               <a:rPr lang="zh-TW" altLang="en-US" smtClean="0"/>
-              <a:t>2026/3/2</a:t>
+              <a:t>2026/3/4</a:t>
             </a:fld>
             <a:endParaRPr lang="zh-TW" altLang="en-US"/>
           </a:p>
@@ -1068,7 +1221,7 @@
           <a:p>
             <a:fld id="{AD2FC38A-1560-48A0-AF93-703BDD9B32DF}" type="datetimeFigureOut">
               <a:rPr lang="zh-TW" altLang="en-US" smtClean="0"/>
-              <a:t>2026/3/2</a:t>
+              <a:t>2026/3/4</a:t>
             </a:fld>
             <a:endParaRPr lang="zh-TW" altLang="en-US"/>
           </a:p>
@@ -1276,7 +1429,7 @@
           <a:p>
             <a:fld id="{AD2FC38A-1560-48A0-AF93-703BDD9B32DF}" type="datetimeFigureOut">
               <a:rPr lang="zh-TW" altLang="en-US" smtClean="0"/>
-              <a:t>2026/3/2</a:t>
+              <a:t>2026/3/4</a:t>
             </a:fld>
             <a:endParaRPr lang="zh-TW" altLang="en-US"/>
           </a:p>
@@ -1474,7 +1627,7 @@
           <a:p>
             <a:fld id="{AD2FC38A-1560-48A0-AF93-703BDD9B32DF}" type="datetimeFigureOut">
               <a:rPr lang="zh-TW" altLang="en-US" smtClean="0"/>
-              <a:t>2026/3/2</a:t>
+              <a:t>2026/3/4</a:t>
             </a:fld>
             <a:endParaRPr lang="zh-TW" altLang="en-US"/>
           </a:p>
@@ -1749,7 +1902,7 @@
           <a:p>
             <a:fld id="{AD2FC38A-1560-48A0-AF93-703BDD9B32DF}" type="datetimeFigureOut">
               <a:rPr lang="zh-TW" altLang="en-US" smtClean="0"/>
-              <a:t>2026/3/2</a:t>
+              <a:t>2026/3/4</a:t>
             </a:fld>
             <a:endParaRPr lang="zh-TW" altLang="en-US"/>
           </a:p>
@@ -2014,7 +2167,7 @@
           <a:p>
             <a:fld id="{AD2FC38A-1560-48A0-AF93-703BDD9B32DF}" type="datetimeFigureOut">
               <a:rPr lang="zh-TW" altLang="en-US" smtClean="0"/>
-              <a:t>2026/3/2</a:t>
+              <a:t>2026/3/4</a:t>
             </a:fld>
             <a:endParaRPr lang="zh-TW" altLang="en-US"/>
           </a:p>
@@ -2426,7 +2579,7 @@
           <a:p>
             <a:fld id="{AD2FC38A-1560-48A0-AF93-703BDD9B32DF}" type="datetimeFigureOut">
               <a:rPr lang="zh-TW" altLang="en-US" smtClean="0"/>
-              <a:t>2026/3/2</a:t>
+              <a:t>2026/3/4</a:t>
             </a:fld>
             <a:endParaRPr lang="zh-TW" altLang="en-US"/>
           </a:p>
@@ -2567,7 +2720,7 @@
           <a:p>
             <a:fld id="{AD2FC38A-1560-48A0-AF93-703BDD9B32DF}" type="datetimeFigureOut">
               <a:rPr lang="zh-TW" altLang="en-US" smtClean="0"/>
-              <a:t>2026/3/2</a:t>
+              <a:t>2026/3/4</a:t>
             </a:fld>
             <a:endParaRPr lang="zh-TW" altLang="en-US"/>
           </a:p>
@@ -2680,7 +2833,7 @@
           <a:p>
             <a:fld id="{AD2FC38A-1560-48A0-AF93-703BDD9B32DF}" type="datetimeFigureOut">
               <a:rPr lang="zh-TW" altLang="en-US" smtClean="0"/>
-              <a:t>2026/3/2</a:t>
+              <a:t>2026/3/4</a:t>
             </a:fld>
             <a:endParaRPr lang="zh-TW" altLang="en-US"/>
           </a:p>
@@ -2991,7 +3144,7 @@
           <a:p>
             <a:fld id="{AD2FC38A-1560-48A0-AF93-703BDD9B32DF}" type="datetimeFigureOut">
               <a:rPr lang="zh-TW" altLang="en-US" smtClean="0"/>
-              <a:t>2026/3/2</a:t>
+              <a:t>2026/3/4</a:t>
             </a:fld>
             <a:endParaRPr lang="zh-TW" altLang="en-US"/>
           </a:p>
@@ -3279,7 +3432,7 @@
           <a:p>
             <a:fld id="{AD2FC38A-1560-48A0-AF93-703BDD9B32DF}" type="datetimeFigureOut">
               <a:rPr lang="zh-TW" altLang="en-US" smtClean="0"/>
-              <a:t>2026/3/2</a:t>
+              <a:t>2026/3/4</a:t>
             </a:fld>
             <a:endParaRPr lang="zh-TW" altLang="en-US"/>
           </a:p>
@@ -3520,7 +3673,7 @@
           <a:p>
             <a:fld id="{AD2FC38A-1560-48A0-AF93-703BDD9B32DF}" type="datetimeFigureOut">
               <a:rPr lang="zh-TW" altLang="en-US" smtClean="0"/>
-              <a:t>2026/3/2</a:t>
+              <a:t>2026/3/4</a:t>
             </a:fld>
             <a:endParaRPr lang="zh-TW" altLang="en-US"/>
           </a:p>
@@ -4830,6 +4983,76 @@
           <p:cNvPr id="2" name="文字方塊 1">
             <a:extLst>
               <a:ext uri="{FF2B5EF4-FFF2-40B4-BE49-F238E27FC236}">
+                <a16:creationId xmlns:a16="http://schemas.microsoft.com/office/drawing/2014/main" id="{EF264ABE-114C-8AA1-C02B-819F58AB6E7A}"/>
+              </a:ext>
+            </a:extLst>
+          </p:cNvPr>
+          <p:cNvSpPr txBox="1"/>
+          <p:nvPr/>
+        </p:nvSpPr>
+        <p:spPr>
+          <a:xfrm>
+            <a:off x="410633" y="414867"/>
+            <a:ext cx="3868367" cy="369332"/>
+          </a:xfrm>
+          <a:prstGeom prst="rect">
+            <a:avLst/>
+          </a:prstGeom>
+          <a:noFill/>
+        </p:spPr>
+        <p:txBody>
+          <a:bodyPr wrap="none" rtlCol="0">
+            <a:spAutoFit/>
+          </a:bodyPr>
+          <a:lstStyle/>
+          <a:p>
+            <a:r>
+              <a:rPr kumimoji="1" lang="en-US" altLang="ja-JP" dirty="0"/>
+              <a:t>Inter-Symbol Interference: </a:t>
+            </a:r>
+            <a:r>
+              <a:rPr kumimoji="1" lang="zh-TW" altLang="en-US" dirty="0"/>
+              <a:t>符號間干擾</a:t>
+            </a:r>
+            <a:endParaRPr kumimoji="1" lang="ja-JP" altLang="en-US" dirty="0"/>
+          </a:p>
+        </p:txBody>
+      </p:sp>
+    </p:spTree>
+    <p:extLst>
+      <p:ext uri="{BB962C8B-B14F-4D97-AF65-F5344CB8AC3E}">
+        <p14:creationId xmlns:p14="http://schemas.microsoft.com/office/powerpoint/2010/main" val="2434136297"/>
+      </p:ext>
+    </p:extLst>
+  </p:cSld>
+  <p:clrMapOvr>
+    <a:masterClrMapping/>
+  </p:clrMapOvr>
+</p:sld>
+</file>
+
+<file path=ppt/slides/slide3.xml><?xml version="1.0" encoding="utf-8"?>
+<p:sld xmlns:a="http://schemas.openxmlformats.org/drawingml/2006/main" xmlns:r="http://schemas.openxmlformats.org/officeDocument/2006/relationships" xmlns:p="http://schemas.openxmlformats.org/presentationml/2006/main">
+  <p:cSld>
+    <p:spTree>
+      <p:nvGrpSpPr>
+        <p:cNvPr id="1" name=""/>
+        <p:cNvGrpSpPr/>
+        <p:nvPr/>
+      </p:nvGrpSpPr>
+      <p:grpSpPr>
+        <a:xfrm>
+          <a:off x="0" y="0"/>
+          <a:ext cx="0" cy="0"/>
+          <a:chOff x="0" y="0"/>
+          <a:chExt cx="0" cy="0"/>
+        </a:xfrm>
+      </p:grpSpPr>
+      <p:sp>
+        <p:nvSpPr>
+          <p:cNvPr id="2" name="文字方塊 1">
+            <a:extLst>
+              <a:ext uri="{FF2B5EF4-FFF2-40B4-BE49-F238E27FC236}">
                 <a16:creationId xmlns:a16="http://schemas.microsoft.com/office/drawing/2014/main" id="{177F8B89-02F3-031F-EB8F-DB43DD094E32}"/>
               </a:ext>
             </a:extLst>
@@ -5431,6 +5654,36 @@
           </a:fontRef>
         </p:style>
       </p:cxnSp>
+      <p:pic>
+        <p:nvPicPr>
+          <p:cNvPr id="7" name="圖片 6">
+            <a:extLst>
+              <a:ext uri="{FF2B5EF4-FFF2-40B4-BE49-F238E27FC236}">
+                <a16:creationId xmlns:a16="http://schemas.microsoft.com/office/drawing/2014/main" id="{A315DF93-510B-94FA-E3B4-CA2A1D923F53}"/>
+              </a:ext>
+            </a:extLst>
+          </p:cNvPr>
+          <p:cNvPicPr>
+            <a:picLocks noChangeAspect="1"/>
+          </p:cNvPicPr>
+          <p:nvPr/>
+        </p:nvPicPr>
+        <p:blipFill>
+          <a:blip r:embed="rId4"/>
+          <a:stretch>
+            <a:fillRect/>
+          </a:stretch>
+        </p:blipFill>
+        <p:spPr>
+          <a:xfrm>
+            <a:off x="5669283" y="4916156"/>
+            <a:ext cx="5432451" cy="1222433"/>
+          </a:xfrm>
+          <a:prstGeom prst="rect">
+            <a:avLst/>
+          </a:prstGeom>
+        </p:spPr>
+      </p:pic>
     </p:spTree>
     <p:extLst>
       <p:ext uri="{BB962C8B-B14F-4D97-AF65-F5344CB8AC3E}">
@@ -5444,7 +5697,7 @@
 </p:sld>
 </file>
 
-<file path=ppt/slides/slide3.xml><?xml version="1.0" encoding="utf-8"?>
+<file path=ppt/slides/slide4.xml><?xml version="1.0" encoding="utf-8"?>
 <p:sld xmlns:a="http://schemas.openxmlformats.org/drawingml/2006/main" xmlns:r="http://schemas.openxmlformats.org/officeDocument/2006/relationships" xmlns:p="http://schemas.openxmlformats.org/presentationml/2006/main">
   <p:cSld>
     <p:spTree>
@@ -5463,6 +5716,406 @@
       </p:grpSpPr>
       <p:sp>
         <p:nvSpPr>
+          <p:cNvPr id="3" name="文字方塊 2">
+            <a:extLst>
+              <a:ext uri="{FF2B5EF4-FFF2-40B4-BE49-F238E27FC236}">
+                <a16:creationId xmlns:a16="http://schemas.microsoft.com/office/drawing/2014/main" id="{E9E2A175-BC6E-E1BC-ED34-D68ED4F8ACDF}"/>
+              </a:ext>
+            </a:extLst>
+          </p:cNvPr>
+          <p:cNvSpPr txBox="1"/>
+          <p:nvPr/>
+        </p:nvSpPr>
+        <p:spPr>
+          <a:xfrm>
+            <a:off x="279515" y="330724"/>
+            <a:ext cx="11588535" cy="3570208"/>
+          </a:xfrm>
+          <a:prstGeom prst="rect">
+            <a:avLst/>
+          </a:prstGeom>
+          <a:noFill/>
+        </p:spPr>
+        <p:txBody>
+          <a:bodyPr wrap="square">
+            <a:spAutoFit/>
+          </a:bodyPr>
+          <a:lstStyle/>
+          <a:p>
+            <a:r>
+              <a:rPr lang="en-US" altLang="ja-JP" dirty="0"/>
+              <a:t>Decision Feedback Equalizer</a:t>
+            </a:r>
+            <a:r>
+              <a:rPr lang="zh-TW" altLang="en-US" dirty="0"/>
+              <a:t> </a:t>
+            </a:r>
+            <a:r>
+              <a:rPr lang="en-US" altLang="zh-TW" dirty="0"/>
+              <a:t>(DFE):</a:t>
+            </a:r>
+          </a:p>
+          <a:p>
+            <a:r>
+              <a:rPr lang="en-US" altLang="zh-TW" sz="1600" dirty="0"/>
+              <a:t>DFE</a:t>
+            </a:r>
+            <a:r>
+              <a:rPr lang="zh-TW" altLang="en-US" sz="1600" dirty="0"/>
+              <a:t>作為</a:t>
+            </a:r>
+            <a:r>
+              <a:rPr lang="en-US" altLang="zh-TW" sz="1600" dirty="0"/>
+              <a:t>RX</a:t>
+            </a:r>
+            <a:r>
+              <a:rPr lang="zh-TW" altLang="en-US" sz="1600" dirty="0"/>
+              <a:t>端的等化器</a:t>
+            </a:r>
+            <a:r>
+              <a:rPr lang="en-US" altLang="zh-TW" sz="1600" dirty="0"/>
+              <a:t>, </a:t>
+            </a:r>
+            <a:r>
+              <a:rPr lang="zh-TW" altLang="en-US" sz="1600" dirty="0"/>
+              <a:t>主要利用已經從類比訊號判別出數位的</a:t>
+            </a:r>
+            <a:r>
+              <a:rPr lang="en-US" altLang="zh-TW" sz="1600" dirty="0"/>
+              <a:t>0/1</a:t>
+            </a:r>
+            <a:r>
+              <a:rPr lang="zh-TW" altLang="en-US" sz="1600" dirty="0"/>
+              <a:t>的資料為</a:t>
+            </a:r>
+            <a:r>
+              <a:rPr lang="en-US" altLang="zh-TW" sz="1600" dirty="0"/>
+              <a:t>based</a:t>
+            </a:r>
+            <a:r>
+              <a:rPr lang="zh-TW" altLang="en-US" sz="1600" dirty="0"/>
+              <a:t>來預估並抵銷訊號的</a:t>
+            </a:r>
+            <a:r>
+              <a:rPr lang="en-US" altLang="zh-TW" sz="1600" dirty="0"/>
+              <a:t>ISI</a:t>
+            </a:r>
+          </a:p>
+          <a:p>
+            <a:endParaRPr lang="en-US" altLang="ja-JP" sz="1600" dirty="0"/>
+          </a:p>
+          <a:p>
+            <a:r>
+              <a:rPr lang="en-US" altLang="ja-JP" sz="1600" dirty="0"/>
+              <a:t>Flow:</a:t>
+            </a:r>
+          </a:p>
+          <a:p>
+            <a:pPr marL="342900" indent="-342900">
+              <a:buAutoNum type="arabicPeriod"/>
+            </a:pPr>
+            <a:r>
+              <a:rPr lang="en-US" altLang="zh-TW" sz="1600" dirty="0"/>
+              <a:t>RX</a:t>
+            </a:r>
+            <a:r>
+              <a:rPr lang="zh-TW" altLang="en-US" sz="1600" dirty="0"/>
+              <a:t>端的</a:t>
+            </a:r>
+            <a:r>
+              <a:rPr lang="en-US" altLang="zh-TW" sz="1600" dirty="0"/>
+              <a:t>ADC</a:t>
+            </a:r>
+            <a:r>
+              <a:rPr lang="zh-TW" altLang="en-US" sz="1600" dirty="0"/>
+              <a:t>或</a:t>
+            </a:r>
+            <a:r>
+              <a:rPr lang="en-US" altLang="zh-TW" sz="1600" dirty="0"/>
+              <a:t>slicer</a:t>
+            </a:r>
+            <a:r>
+              <a:rPr lang="zh-TW" altLang="en-US" sz="1600" dirty="0"/>
+              <a:t>對訊號做判斷得出</a:t>
+            </a:r>
+            <a:r>
+              <a:rPr lang="en-US" altLang="zh-TW" sz="1600" dirty="0"/>
+              <a:t>logic 1/0</a:t>
+            </a:r>
+          </a:p>
+          <a:p>
+            <a:pPr marL="342900" indent="-342900">
+              <a:buAutoNum type="arabicPeriod"/>
+            </a:pPr>
+            <a:r>
+              <a:rPr lang="zh-TW" altLang="en-US" sz="1600" dirty="0"/>
+              <a:t>將判斷的結果存入好幾級的</a:t>
+            </a:r>
+            <a:r>
+              <a:rPr lang="en-US" altLang="zh-TW" sz="1600" dirty="0"/>
+              <a:t>DFF</a:t>
+            </a:r>
+            <a:r>
+              <a:rPr lang="zh-TW" altLang="en-US" sz="1600" dirty="0"/>
+              <a:t> </a:t>
+            </a:r>
+            <a:r>
+              <a:rPr lang="en-US" altLang="zh-TW" sz="1600" dirty="0"/>
+              <a:t>(</a:t>
+            </a:r>
+            <a:r>
+              <a:rPr lang="zh-TW" altLang="en-US" sz="1600" dirty="0"/>
+              <a:t>做</a:t>
+            </a:r>
+            <a:r>
+              <a:rPr lang="en-US" altLang="zh-TW" sz="1600" dirty="0"/>
+              <a:t>delay)</a:t>
+            </a:r>
+          </a:p>
+          <a:p>
+            <a:pPr marL="342900" indent="-342900">
+              <a:buAutoNum type="arabicPeriod"/>
+            </a:pPr>
+            <a:r>
+              <a:rPr lang="zh-TW" altLang="en-US" sz="1600" dirty="0"/>
+              <a:t>透過</a:t>
+            </a:r>
+            <a:r>
+              <a:rPr lang="en-US" altLang="zh-TW" sz="1600" dirty="0"/>
+              <a:t>TX</a:t>
+            </a:r>
+            <a:r>
+              <a:rPr lang="zh-TW" altLang="en-US" sz="1600" dirty="0"/>
+              <a:t>送到</a:t>
+            </a:r>
+            <a:r>
+              <a:rPr lang="en-US" altLang="zh-TW" sz="1600" dirty="0"/>
+              <a:t>RX</a:t>
+            </a:r>
+            <a:r>
+              <a:rPr lang="zh-TW" altLang="en-US" sz="1600" dirty="0"/>
+              <a:t>的通道特性去設定每個</a:t>
+            </a:r>
+            <a:r>
+              <a:rPr lang="en-US" altLang="zh-TW" sz="1600" dirty="0"/>
+              <a:t>DFF</a:t>
+            </a:r>
+            <a:r>
+              <a:rPr lang="zh-TW" altLang="en-US" sz="1600" dirty="0"/>
+              <a:t>的權重</a:t>
+            </a:r>
+            <a:r>
+              <a:rPr lang="en-US" altLang="zh-TW" sz="1600" dirty="0"/>
+              <a:t>, </a:t>
+            </a:r>
+            <a:r>
+              <a:rPr lang="zh-TW" altLang="en-US" sz="1600" dirty="0"/>
+              <a:t>將判斷的結果乘上權重後</a:t>
+            </a:r>
+            <a:r>
+              <a:rPr lang="en-US" altLang="zh-TW" sz="1600" dirty="0"/>
+              <a:t>feedback</a:t>
+            </a:r>
+            <a:r>
+              <a:rPr lang="zh-TW" altLang="en-US" sz="1600" dirty="0"/>
+              <a:t>到類比訊號那邊去相減</a:t>
+            </a:r>
+            <a:br>
+              <a:rPr lang="en-US" altLang="zh-TW" sz="1600" dirty="0"/>
+            </a:br>
+            <a:endParaRPr lang="en-US" altLang="zh-TW" sz="1600" dirty="0"/>
+          </a:p>
+          <a:p>
+            <a:r>
+              <a:rPr lang="zh-TW" altLang="en-US" sz="1600" dirty="0"/>
+              <a:t>從這三部來清除前幾個位元留下的干擾</a:t>
+            </a:r>
+            <a:endParaRPr lang="en-US" altLang="zh-TW" sz="1600" dirty="0"/>
+          </a:p>
+          <a:p>
+            <a:endParaRPr lang="en-US" altLang="ja-JP" sz="1600" dirty="0"/>
+          </a:p>
+          <a:p>
+            <a:r>
+              <a:rPr lang="zh-TW" altLang="en-US" sz="1600" dirty="0"/>
+              <a:t>優點是</a:t>
+            </a:r>
+            <a:r>
+              <a:rPr lang="en-US" altLang="zh-TW" sz="1600" dirty="0"/>
+              <a:t>:</a:t>
+            </a:r>
+          </a:p>
+          <a:p>
+            <a:pPr marL="342900" indent="-342900">
+              <a:buAutoNum type="arabicPeriod"/>
+            </a:pPr>
+            <a:r>
+              <a:rPr lang="zh-TW" altLang="en-US" sz="1600" dirty="0"/>
+              <a:t>不放大</a:t>
+            </a:r>
+            <a:r>
+              <a:rPr lang="en-US" altLang="zh-TW" sz="1600" dirty="0"/>
+              <a:t>noise, </a:t>
+            </a:r>
+            <a:r>
+              <a:rPr lang="zh-TW" altLang="en-US" sz="1600" dirty="0"/>
+              <a:t>不管是</a:t>
+            </a:r>
+            <a:r>
+              <a:rPr lang="en-US" altLang="zh-TW" sz="1600" dirty="0"/>
+              <a:t>FFE</a:t>
+            </a:r>
+            <a:r>
+              <a:rPr lang="zh-TW" altLang="en-US" sz="1600" dirty="0"/>
+              <a:t>或</a:t>
+            </a:r>
+            <a:r>
+              <a:rPr lang="en-US" altLang="zh-TW" sz="1600" dirty="0"/>
+              <a:t>CTLE</a:t>
+            </a:r>
+            <a:r>
+              <a:rPr lang="zh-TW" altLang="en-US" sz="1600" dirty="0"/>
+              <a:t>都會在放大高頻時順便放大雜訊</a:t>
+            </a:r>
+            <a:r>
+              <a:rPr lang="en-US" altLang="zh-TW" sz="1600" dirty="0"/>
+              <a:t>, </a:t>
+            </a:r>
+            <a:r>
+              <a:rPr lang="zh-TW" altLang="en-US" sz="1600" dirty="0"/>
+              <a:t>而</a:t>
+            </a:r>
+            <a:r>
+              <a:rPr lang="en-US" altLang="zh-TW" sz="1600" dirty="0"/>
+              <a:t>DFE</a:t>
+            </a:r>
+            <a:r>
+              <a:rPr lang="zh-TW" altLang="en-US" sz="1600" dirty="0"/>
+              <a:t>透過歷史資料來判別</a:t>
+            </a:r>
+            <a:r>
+              <a:rPr lang="en-US" altLang="zh-TW" sz="1600" dirty="0"/>
+              <a:t>, </a:t>
+            </a:r>
+            <a:r>
+              <a:rPr lang="zh-TW" altLang="en-US" sz="1600" dirty="0"/>
+              <a:t>所以在</a:t>
+            </a:r>
+            <a:r>
+              <a:rPr lang="en-US" altLang="zh-TW" sz="1600" dirty="0"/>
+              <a:t>feedback</a:t>
+            </a:r>
+            <a:r>
+              <a:rPr lang="zh-TW" altLang="en-US" sz="1600" dirty="0"/>
+              <a:t>回去時不會有</a:t>
+            </a:r>
+            <a:r>
+              <a:rPr lang="en-US" altLang="zh-TW" sz="1600" dirty="0"/>
+              <a:t>noise</a:t>
+            </a:r>
+          </a:p>
+          <a:p>
+            <a:endParaRPr lang="en-US" altLang="ja-JP" sz="1600" dirty="0"/>
+          </a:p>
+          <a:p>
+            <a:r>
+              <a:rPr lang="zh-TW" altLang="en-US" sz="1600" dirty="0"/>
+              <a:t>缺點也很明顯</a:t>
+            </a:r>
+            <a:r>
+              <a:rPr lang="en-US" altLang="zh-TW" sz="1600" dirty="0"/>
+              <a:t>, </a:t>
+            </a:r>
+            <a:r>
+              <a:rPr lang="zh-TW" altLang="en-US" sz="1600" dirty="0"/>
+              <a:t>如果一開始就判別錯誤</a:t>
+            </a:r>
+            <a:r>
+              <a:rPr lang="en-US" altLang="zh-TW" sz="1600" dirty="0"/>
+              <a:t>, </a:t>
+            </a:r>
+            <a:r>
+              <a:rPr lang="zh-TW" altLang="en-US" sz="1600" dirty="0"/>
+              <a:t>補償回去的結果就會錯誤</a:t>
+            </a:r>
+            <a:r>
+              <a:rPr lang="en-US" altLang="zh-TW" sz="1600" dirty="0"/>
+              <a:t>, </a:t>
+            </a:r>
+            <a:r>
+              <a:rPr lang="zh-TW" altLang="en-US" sz="1600" dirty="0"/>
+              <a:t>導致後續判斷結果都是</a:t>
+            </a:r>
+            <a:r>
+              <a:rPr lang="en-US" altLang="zh-TW" sz="1600" dirty="0"/>
+              <a:t>trivial (Error Propagation)</a:t>
+            </a:r>
+            <a:endParaRPr lang="ja-JP" altLang="en-US" sz="1600" dirty="0"/>
+          </a:p>
+        </p:txBody>
+      </p:sp>
+      <p:pic>
+        <p:nvPicPr>
+          <p:cNvPr id="5" name="圖片 4">
+            <a:extLst>
+              <a:ext uri="{FF2B5EF4-FFF2-40B4-BE49-F238E27FC236}">
+                <a16:creationId xmlns:a16="http://schemas.microsoft.com/office/drawing/2014/main" id="{A157F1F2-645D-A332-D578-F6DE26CEA6D0}"/>
+              </a:ext>
+            </a:extLst>
+          </p:cNvPr>
+          <p:cNvPicPr>
+            <a:picLocks noChangeAspect="1"/>
+          </p:cNvPicPr>
+          <p:nvPr/>
+        </p:nvPicPr>
+        <p:blipFill>
+          <a:blip r:embed="rId2"/>
+          <a:stretch>
+            <a:fillRect/>
+          </a:stretch>
+        </p:blipFill>
+        <p:spPr>
+          <a:xfrm>
+            <a:off x="7867350" y="4242863"/>
+            <a:ext cx="3457575" cy="2395538"/>
+          </a:xfrm>
+          <a:prstGeom prst="rect">
+            <a:avLst/>
+          </a:prstGeom>
+        </p:spPr>
+      </p:pic>
+    </p:spTree>
+    <p:extLst>
+      <p:ext uri="{BB962C8B-B14F-4D97-AF65-F5344CB8AC3E}">
+        <p14:creationId xmlns:p14="http://schemas.microsoft.com/office/powerpoint/2010/main" val="2236840115"/>
+      </p:ext>
+    </p:extLst>
+  </p:cSld>
+  <p:clrMapOvr>
+    <a:masterClrMapping/>
+  </p:clrMapOvr>
+</p:sld>
+</file>
+
+<file path=ppt/slides/slide5.xml><?xml version="1.0" encoding="utf-8"?>
+<p:sld xmlns:a="http://schemas.openxmlformats.org/drawingml/2006/main" xmlns:r="http://schemas.openxmlformats.org/officeDocument/2006/relationships" xmlns:p="http://schemas.openxmlformats.org/presentationml/2006/main">
+  <p:cSld>
+    <p:spTree>
+      <p:nvGrpSpPr>
+        <p:cNvPr id="1" name=""/>
+        <p:cNvGrpSpPr/>
+        <p:nvPr/>
+      </p:nvGrpSpPr>
+      <p:grpSpPr>
+        <a:xfrm>
+          <a:off x="0" y="0"/>
+          <a:ext cx="0" cy="0"/>
+          <a:chOff x="0" y="0"/>
+          <a:chExt cx="0" cy="0"/>
+        </a:xfrm>
+      </p:grpSpPr>
+      <p:sp>
+        <p:nvSpPr>
           <p:cNvPr id="2" name="文字方塊 1">
             <a:extLst>
               <a:ext uri="{FF2B5EF4-FFF2-40B4-BE49-F238E27FC236}">
@@ -5574,7 +6227,7 @@
           <p:nvPr/>
         </p:nvPicPr>
         <p:blipFill>
-          <a:blip r:embed="rId2"/>
+          <a:blip r:embed="rId3"/>
           <a:stretch>
             <a:fillRect/>
           </a:stretch>
